--- a/app/templates/universidad_azul/plantilla_curso.pptx
+++ b/app/templates/universidad_azul/plantilla_curso.pptx
@@ -201,7 +201,7 @@
           <a:p>
             <a:fld id="{03C7FEFC-EB52-44D6-B3F1-2A7BB7FA4226}" type="datetimeFigureOut">
               <a:rPr lang="es-PE" smtClean="0"/>
-              <a:t>28/01/2026</a:t>
+              <a:t>2/02/2026</a:t>
             </a:fld>
             <a:endParaRPr lang="es-PE" dirty="0"/>
           </a:p>
@@ -366,7 +366,7 @@
           <a:p>
             <a:fld id="{64955E78-CBAA-441B-9163-D9CD5E983BDA}" type="datetimeFigureOut">
               <a:rPr lang="en-US" smtClean="0"/>
-              <a:t>1/28/2026</a:t>
+              <a:t>2/2/2026</a:t>
             </a:fld>
             <a:endParaRPr lang="en-US" dirty="0"/>
           </a:p>
@@ -765,7 +765,7 @@
           <a:p>
             <a:fld id="{5C4C4E00-4716-4B48-9D97-535E4F94A274}" type="datetimeFigureOut">
               <a:rPr lang="es-PE" smtClean="0"/>
-              <a:t>28/01/2026</a:t>
+              <a:t>2/02/2026</a:t>
             </a:fld>
             <a:endParaRPr lang="es-PE" dirty="0"/>
           </a:p>
@@ -935,7 +935,7 @@
           <a:p>
             <a:fld id="{5C4C4E00-4716-4B48-9D97-535E4F94A274}" type="datetimeFigureOut">
               <a:rPr lang="es-PE" smtClean="0"/>
-              <a:t>28/01/2026</a:t>
+              <a:t>2/02/2026</a:t>
             </a:fld>
             <a:endParaRPr lang="es-PE" dirty="0"/>
           </a:p>
@@ -1115,7 +1115,7 @@
           <a:p>
             <a:fld id="{5C4C4E00-4716-4B48-9D97-535E4F94A274}" type="datetimeFigureOut">
               <a:rPr lang="es-PE" smtClean="0"/>
-              <a:t>28/01/2026</a:t>
+              <a:t>2/02/2026</a:t>
             </a:fld>
             <a:endParaRPr lang="es-PE" dirty="0"/>
           </a:p>
@@ -1285,7 +1285,7 @@
           <a:p>
             <a:fld id="{5C4C4E00-4716-4B48-9D97-535E4F94A274}" type="datetimeFigureOut">
               <a:rPr lang="es-PE" smtClean="0"/>
-              <a:t>28/01/2026</a:t>
+              <a:t>2/02/2026</a:t>
             </a:fld>
             <a:endParaRPr lang="es-PE" dirty="0"/>
           </a:p>
@@ -1529,7 +1529,7 @@
           <a:p>
             <a:fld id="{5C4C4E00-4716-4B48-9D97-535E4F94A274}" type="datetimeFigureOut">
               <a:rPr lang="es-PE" smtClean="0"/>
-              <a:t>28/01/2026</a:t>
+              <a:t>2/02/2026</a:t>
             </a:fld>
             <a:endParaRPr lang="es-PE" dirty="0"/>
           </a:p>
@@ -1761,7 +1761,7 @@
           <a:p>
             <a:fld id="{5C4C4E00-4716-4B48-9D97-535E4F94A274}" type="datetimeFigureOut">
               <a:rPr lang="es-PE" smtClean="0"/>
-              <a:t>28/01/2026</a:t>
+              <a:t>2/02/2026</a:t>
             </a:fld>
             <a:endParaRPr lang="es-PE" dirty="0"/>
           </a:p>
@@ -2128,7 +2128,7 @@
           <a:p>
             <a:fld id="{5C4C4E00-4716-4B48-9D97-535E4F94A274}" type="datetimeFigureOut">
               <a:rPr lang="es-PE" smtClean="0"/>
-              <a:t>28/01/2026</a:t>
+              <a:t>2/02/2026</a:t>
             </a:fld>
             <a:endParaRPr lang="es-PE" dirty="0"/>
           </a:p>
@@ -2246,7 +2246,7 @@
           <a:p>
             <a:fld id="{5C4C4E00-4716-4B48-9D97-535E4F94A274}" type="datetimeFigureOut">
               <a:rPr lang="es-PE" smtClean="0"/>
-              <a:t>28/01/2026</a:t>
+              <a:t>2/02/2026</a:t>
             </a:fld>
             <a:endParaRPr lang="es-PE" dirty="0"/>
           </a:p>
@@ -2341,7 +2341,7 @@
           <a:p>
             <a:fld id="{5C4C4E00-4716-4B48-9D97-535E4F94A274}" type="datetimeFigureOut">
               <a:rPr lang="es-PE" smtClean="0"/>
-              <a:t>28/01/2026</a:t>
+              <a:t>2/02/2026</a:t>
             </a:fld>
             <a:endParaRPr lang="es-PE" dirty="0"/>
           </a:p>
@@ -2618,7 +2618,7 @@
           <a:p>
             <a:fld id="{5C4C4E00-4716-4B48-9D97-535E4F94A274}" type="datetimeFigureOut">
               <a:rPr lang="es-PE" smtClean="0"/>
-              <a:t>28/01/2026</a:t>
+              <a:t>2/02/2026</a:t>
             </a:fld>
             <a:endParaRPr lang="es-PE" dirty="0"/>
           </a:p>
@@ -2875,7 +2875,7 @@
           <a:p>
             <a:fld id="{5C4C4E00-4716-4B48-9D97-535E4F94A274}" type="datetimeFigureOut">
               <a:rPr lang="es-PE" smtClean="0"/>
-              <a:t>28/01/2026</a:t>
+              <a:t>2/02/2026</a:t>
             </a:fld>
             <a:endParaRPr lang="es-PE" dirty="0"/>
           </a:p>
@@ -3088,7 +3088,7 @@
           <a:p>
             <a:fld id="{5C4C4E00-4716-4B48-9D97-535E4F94A274}" type="datetimeFigureOut">
               <a:rPr lang="es-PE" smtClean="0"/>
-              <a:t>28/01/2026</a:t>
+              <a:t>2/02/2026</a:t>
             </a:fld>
             <a:endParaRPr lang="es-PE" dirty="0"/>
           </a:p>
@@ -5231,14 +5231,14 @@
           <p:nvPr>
             <p:extLst>
               <p:ext uri="{D42A27DB-BD31-4B8C-83A1-F6EECF244321}">
-                <p14:modId xmlns:p14="http://schemas.microsoft.com/office/powerpoint/2010/main" val="3603500712"/>
+                <p14:modId xmlns:p14="http://schemas.microsoft.com/office/powerpoint/2010/main" val="2491103922"/>
               </p:ext>
             </p:extLst>
           </p:nvPr>
         </p:nvGraphicFramePr>
         <p:xfrm>
           <a:off x="745017" y="3129360"/>
-          <a:ext cx="5367967" cy="3072491"/>
+          <a:ext cx="5367967" cy="3941796"/>
         </p:xfrm>
         <a:graphic>
           <a:graphicData uri="http://schemas.openxmlformats.org/drawingml/2006/table">
@@ -5454,7 +5454,7 @@
                           <a:ea typeface="+mn-ea"/>
                           <a:cs typeface="+mn-cs"/>
                         </a:rPr>
-                        <a:t>40</a:t>
+                        <a:t>{{HORAS_MODULO}}</a:t>
                       </a:r>
                       <a:endParaRPr lang="en-US" sz="1050" b="0" kern="1200" dirty="0">
                         <a:solidFill>
@@ -5574,7 +5574,7 @@
                           <a:ea typeface="+mn-ea"/>
                           <a:cs typeface="+mn-cs"/>
                         </a:rPr>
-                        <a:t>50</a:t>
+                        <a:t>{{HORAS_MODULO}}</a:t>
                       </a:r>
                       <a:endParaRPr lang="en-US" sz="1050" b="0" kern="1200" dirty="0">
                         <a:solidFill>
@@ -5687,7 +5687,7 @@
                           <a:ea typeface="+mn-ea"/>
                           <a:cs typeface="+mn-cs"/>
                         </a:rPr>
-                        <a:t>50</a:t>
+                        <a:t>{{HORAS_MODULO}}</a:t>
                       </a:r>
                       <a:endParaRPr lang="en-US" sz="1050" b="0" kern="1200" dirty="0">
                         <a:solidFill>
@@ -5816,7 +5816,7 @@
                           <a:ea typeface="+mn-ea"/>
                           <a:cs typeface="+mn-cs"/>
                         </a:rPr>
-                        <a:t>50</a:t>
+                        <a:t>{{HORAS_MODULO}}</a:t>
                       </a:r>
                       <a:endParaRPr lang="en-US" sz="1050" b="0" kern="1200" dirty="0">
                         <a:solidFill>
@@ -5945,7 +5945,7 @@
                           <a:ea typeface="+mn-ea"/>
                           <a:cs typeface="+mn-cs"/>
                         </a:rPr>
-                        <a:t>50</a:t>
+                        <a:t>{{HORAS_MODULO}}</a:t>
                       </a:r>
                       <a:endParaRPr lang="en-US" sz="1050" b="0" kern="1200" dirty="0">
                         <a:solidFill>
@@ -6053,7 +6053,7 @@
                           <a:ea typeface="+mn-ea"/>
                           <a:cs typeface="+mn-cs"/>
                         </a:rPr>
-                        <a:t>240</a:t>
+                        <a:t>{{HORAS_ACADEMICAS}}</a:t>
                       </a:r>
                       <a:endParaRPr lang="en-US" sz="1050" b="0" kern="1200" dirty="0">
                         <a:solidFill>

--- a/app/templates/universidad_azul/plantilla_curso.pptx
+++ b/app/templates/universidad_azul/plantilla_curso.pptx
@@ -119,6 +119,106 @@
 </p:presentation>
 </file>
 
+<file path=ppt/revisionInfo.xml><?xml version="1.0" encoding="utf-8"?>
+<p1510:revInfo xmlns:a="http://schemas.openxmlformats.org/drawingml/2006/main" xmlns:r="http://schemas.openxmlformats.org/officeDocument/2006/relationships" xmlns:p1510="http://schemas.microsoft.com/office/powerpoint/2015/10/main">
+  <p1510:revLst>
+    <p1510:client id="{EB93C467-2F23-4350-844F-F79CF4DA39B1}" v="5" dt="2026-03-02T01:11:12.153"/>
+  </p1510:revLst>
+</p1510:revInfo>
+</file>
+
+<file path=ppt/changesInfos/changesInfo1.xml><?xml version="1.0" encoding="utf-8"?>
+<pc:chgInfo xmlns:a="http://schemas.openxmlformats.org/drawingml/2006/main" xmlns:r="http://schemas.openxmlformats.org/officeDocument/2006/relationships" xmlns:ac="http://schemas.microsoft.com/office/drawing/2013/main/command" xmlns:pc="http://schemas.microsoft.com/office/powerpoint/2013/main/command">
+  <pc:docChgLst>
+    <pc:chgData name="Benjamín de Jesús Cueva Niño de Guzmán" userId="56da303013910523" providerId="LiveId" clId="{532B7A48-8887-4F62-9537-0BA1FAE83637}"/>
+    <pc:docChg chg="undo custSel modSld">
+      <pc:chgData name="Benjamín de Jesús Cueva Niño de Guzmán" userId="56da303013910523" providerId="LiveId" clId="{532B7A48-8887-4F62-9537-0BA1FAE83637}" dt="2026-03-02T01:11:12.153" v="50" actId="962"/>
+      <pc:docMkLst>
+        <pc:docMk/>
+      </pc:docMkLst>
+      <pc:sldChg chg="addSp delSp modSp mod">
+        <pc:chgData name="Benjamín de Jesús Cueva Niño de Guzmán" userId="56da303013910523" providerId="LiveId" clId="{532B7A48-8887-4F62-9537-0BA1FAE83637}" dt="2026-02-28T16:33:45.561" v="49" actId="478"/>
+        <pc:sldMkLst>
+          <pc:docMk/>
+          <pc:sldMk cId="1975654795" sldId="392"/>
+        </pc:sldMkLst>
+        <pc:spChg chg="mod">
+          <ac:chgData name="Benjamín de Jesús Cueva Niño de Guzmán" userId="56da303013910523" providerId="LiveId" clId="{532B7A48-8887-4F62-9537-0BA1FAE83637}" dt="2026-02-28T00:01:39.011" v="17" actId="1035"/>
+          <ac:spMkLst>
+            <pc:docMk/>
+            <pc:sldMk cId="1975654795" sldId="392"/>
+            <ac:spMk id="2" creationId="{8999ECBF-332A-795D-7E69-2FB7C2F9E294}"/>
+          </ac:spMkLst>
+        </pc:spChg>
+        <pc:spChg chg="mod">
+          <ac:chgData name="Benjamín de Jesús Cueva Niño de Guzmán" userId="56da303013910523" providerId="LiveId" clId="{532B7A48-8887-4F62-9537-0BA1FAE83637}" dt="2026-02-28T00:01:39.011" v="17" actId="1035"/>
+          <ac:spMkLst>
+            <pc:docMk/>
+            <pc:sldMk cId="1975654795" sldId="392"/>
+            <ac:spMk id="3" creationId="{8DC1C730-CF27-EE49-4929-25151E2F6190}"/>
+          </ac:spMkLst>
+        </pc:spChg>
+        <pc:spChg chg="mod">
+          <ac:chgData name="Benjamín de Jesús Cueva Niño de Guzmán" userId="56da303013910523" providerId="LiveId" clId="{532B7A48-8887-4F62-9537-0BA1FAE83637}" dt="2026-02-28T00:03:14.598" v="45" actId="1035"/>
+          <ac:spMkLst>
+            <pc:docMk/>
+            <pc:sldMk cId="1975654795" sldId="392"/>
+            <ac:spMk id="7" creationId="{6181BA67-E1F2-0033-0081-C78685C4EFFB}"/>
+          </ac:spMkLst>
+        </pc:spChg>
+        <pc:spChg chg="mod">
+          <ac:chgData name="Benjamín de Jesús Cueva Niño de Guzmán" userId="56da303013910523" providerId="LiveId" clId="{532B7A48-8887-4F62-9537-0BA1FAE83637}" dt="2026-02-28T00:03:03.801" v="31" actId="20577"/>
+          <ac:spMkLst>
+            <pc:docMk/>
+            <pc:sldMk cId="1975654795" sldId="392"/>
+            <ac:spMk id="19" creationId="{C0D9FAA0-08E8-BE91-7635-49B14F81758C}"/>
+          </ac:spMkLst>
+        </pc:spChg>
+        <pc:picChg chg="mod">
+          <ac:chgData name="Benjamín de Jesús Cueva Niño de Guzmán" userId="56da303013910523" providerId="LiveId" clId="{532B7A48-8887-4F62-9537-0BA1FAE83637}" dt="2026-02-28T00:03:14.598" v="45" actId="1035"/>
+          <ac:picMkLst>
+            <pc:docMk/>
+            <pc:sldMk cId="1975654795" sldId="392"/>
+            <ac:picMk id="4" creationId="{8AFE8DB8-BB3D-9C4F-317A-D420ABEEF7CD}"/>
+          </ac:picMkLst>
+        </pc:picChg>
+      </pc:sldChg>
+      <pc:sldChg chg="modSp mod">
+        <pc:chgData name="Benjamín de Jesús Cueva Niño de Guzmán" userId="56da303013910523" providerId="LiveId" clId="{532B7A48-8887-4F62-9537-0BA1FAE83637}" dt="2026-03-02T01:11:12.153" v="50" actId="962"/>
+        <pc:sldMkLst>
+          <pc:docMk/>
+          <pc:sldMk cId="2298071669" sldId="393"/>
+        </pc:sldMkLst>
+        <pc:spChg chg="mod">
+          <ac:chgData name="Benjamín de Jesús Cueva Niño de Guzmán" userId="56da303013910523" providerId="LiveId" clId="{532B7A48-8887-4F62-9537-0BA1FAE83637}" dt="2026-02-28T00:02:10.553" v="23" actId="1076"/>
+          <ac:spMkLst>
+            <pc:docMk/>
+            <pc:sldMk cId="2298071669" sldId="393"/>
+            <ac:spMk id="2" creationId="{73FC219E-6E54-02C6-2D68-ED6FE3FBB5EC}"/>
+          </ac:spMkLst>
+        </pc:spChg>
+        <pc:spChg chg="mod">
+          <ac:chgData name="Benjamín de Jesús Cueva Niño de Guzmán" userId="56da303013910523" providerId="LiveId" clId="{532B7A48-8887-4F62-9537-0BA1FAE83637}" dt="2026-02-28T00:02:31.495" v="25" actId="962"/>
+          <ac:spMkLst>
+            <pc:docMk/>
+            <pc:sldMk cId="2298071669" sldId="393"/>
+            <ac:spMk id="10" creationId="{D44B2567-D1AD-5922-21FA-C8B8BF799204}"/>
+          </ac:spMkLst>
+        </pc:spChg>
+        <pc:graphicFrameChg chg="mod modGraphic">
+          <ac:chgData name="Benjamín de Jesús Cueva Niño de Guzmán" userId="56da303013910523" providerId="LiveId" clId="{532B7A48-8887-4F62-9537-0BA1FAE83637}" dt="2026-03-02T01:11:12.153" v="50" actId="962"/>
+          <ac:graphicFrameMkLst>
+            <pc:docMk/>
+            <pc:sldMk cId="2298071669" sldId="393"/>
+            <ac:graphicFrameMk id="14" creationId="{727B0309-C2F5-4DEB-3AF8-D7FD142D7B92}"/>
+          </ac:graphicFrameMkLst>
+        </pc:graphicFrameChg>
+      </pc:sldChg>
+    </pc:docChg>
+  </pc:docChgLst>
+</pc:chgInfo>
+</file>
+
 <file path=ppt/handoutMasters/handoutMaster1.xml><?xml version="1.0" encoding="utf-8"?>
 <p:handoutMaster xmlns:a="http://schemas.openxmlformats.org/drawingml/2006/main" xmlns:r="http://schemas.openxmlformats.org/officeDocument/2006/relationships" xmlns:p="http://schemas.openxmlformats.org/presentationml/2006/main">
   <p:cSld>
@@ -201,7 +301,7 @@
           <a:p>
             <a:fld id="{03C7FEFC-EB52-44D6-B3F1-2A7BB7FA4226}" type="datetimeFigureOut">
               <a:rPr lang="es-PE" smtClean="0"/>
-              <a:t>2/02/2026</a:t>
+              <a:t>1/03/2026</a:t>
             </a:fld>
             <a:endParaRPr lang="es-PE" dirty="0"/>
           </a:p>
@@ -366,7 +466,7 @@
           <a:p>
             <a:fld id="{64955E78-CBAA-441B-9163-D9CD5E983BDA}" type="datetimeFigureOut">
               <a:rPr lang="en-US" smtClean="0"/>
-              <a:t>2/2/2026</a:t>
+              <a:t>3/1/2026</a:t>
             </a:fld>
             <a:endParaRPr lang="en-US" dirty="0"/>
           </a:p>
@@ -765,7 +865,7 @@
           <a:p>
             <a:fld id="{5C4C4E00-4716-4B48-9D97-535E4F94A274}" type="datetimeFigureOut">
               <a:rPr lang="es-PE" smtClean="0"/>
-              <a:t>2/02/2026</a:t>
+              <a:t>1/03/2026</a:t>
             </a:fld>
             <a:endParaRPr lang="es-PE" dirty="0"/>
           </a:p>
@@ -935,7 +1035,7 @@
           <a:p>
             <a:fld id="{5C4C4E00-4716-4B48-9D97-535E4F94A274}" type="datetimeFigureOut">
               <a:rPr lang="es-PE" smtClean="0"/>
-              <a:t>2/02/2026</a:t>
+              <a:t>1/03/2026</a:t>
             </a:fld>
             <a:endParaRPr lang="es-PE" dirty="0"/>
           </a:p>
@@ -1115,7 +1215,7 @@
           <a:p>
             <a:fld id="{5C4C4E00-4716-4B48-9D97-535E4F94A274}" type="datetimeFigureOut">
               <a:rPr lang="es-PE" smtClean="0"/>
-              <a:t>2/02/2026</a:t>
+              <a:t>1/03/2026</a:t>
             </a:fld>
             <a:endParaRPr lang="es-PE" dirty="0"/>
           </a:p>
@@ -1285,7 +1385,7 @@
           <a:p>
             <a:fld id="{5C4C4E00-4716-4B48-9D97-535E4F94A274}" type="datetimeFigureOut">
               <a:rPr lang="es-PE" smtClean="0"/>
-              <a:t>2/02/2026</a:t>
+              <a:t>1/03/2026</a:t>
             </a:fld>
             <a:endParaRPr lang="es-PE" dirty="0"/>
           </a:p>
@@ -1529,7 +1629,7 @@
           <a:p>
             <a:fld id="{5C4C4E00-4716-4B48-9D97-535E4F94A274}" type="datetimeFigureOut">
               <a:rPr lang="es-PE" smtClean="0"/>
-              <a:t>2/02/2026</a:t>
+              <a:t>1/03/2026</a:t>
             </a:fld>
             <a:endParaRPr lang="es-PE" dirty="0"/>
           </a:p>
@@ -1761,7 +1861,7 @@
           <a:p>
             <a:fld id="{5C4C4E00-4716-4B48-9D97-535E4F94A274}" type="datetimeFigureOut">
               <a:rPr lang="es-PE" smtClean="0"/>
-              <a:t>2/02/2026</a:t>
+              <a:t>1/03/2026</a:t>
             </a:fld>
             <a:endParaRPr lang="es-PE" dirty="0"/>
           </a:p>
@@ -2128,7 +2228,7 @@
           <a:p>
             <a:fld id="{5C4C4E00-4716-4B48-9D97-535E4F94A274}" type="datetimeFigureOut">
               <a:rPr lang="es-PE" smtClean="0"/>
-              <a:t>2/02/2026</a:t>
+              <a:t>1/03/2026</a:t>
             </a:fld>
             <a:endParaRPr lang="es-PE" dirty="0"/>
           </a:p>
@@ -2246,7 +2346,7 @@
           <a:p>
             <a:fld id="{5C4C4E00-4716-4B48-9D97-535E4F94A274}" type="datetimeFigureOut">
               <a:rPr lang="es-PE" smtClean="0"/>
-              <a:t>2/02/2026</a:t>
+              <a:t>1/03/2026</a:t>
             </a:fld>
             <a:endParaRPr lang="es-PE" dirty="0"/>
           </a:p>
@@ -2341,7 +2441,7 @@
           <a:p>
             <a:fld id="{5C4C4E00-4716-4B48-9D97-535E4F94A274}" type="datetimeFigureOut">
               <a:rPr lang="es-PE" smtClean="0"/>
-              <a:t>2/02/2026</a:t>
+              <a:t>1/03/2026</a:t>
             </a:fld>
             <a:endParaRPr lang="es-PE" dirty="0"/>
           </a:p>
@@ -2618,7 +2718,7 @@
           <a:p>
             <a:fld id="{5C4C4E00-4716-4B48-9D97-535E4F94A274}" type="datetimeFigureOut">
               <a:rPr lang="es-PE" smtClean="0"/>
-              <a:t>2/02/2026</a:t>
+              <a:t>1/03/2026</a:t>
             </a:fld>
             <a:endParaRPr lang="es-PE" dirty="0"/>
           </a:p>
@@ -2875,7 +2975,7 @@
           <a:p>
             <a:fld id="{5C4C4E00-4716-4B48-9D97-535E4F94A274}" type="datetimeFigureOut">
               <a:rPr lang="es-PE" smtClean="0"/>
-              <a:t>2/02/2026</a:t>
+              <a:t>1/03/2026</a:t>
             </a:fld>
             <a:endParaRPr lang="es-PE" dirty="0"/>
           </a:p>
@@ -3088,7 +3188,7 @@
           <a:p>
             <a:fld id="{5C4C4E00-4716-4B48-9D97-535E4F94A274}" type="datetimeFigureOut">
               <a:rPr lang="es-PE" smtClean="0"/>
-              <a:t>2/02/2026</a:t>
+              <a:t>1/03/2026</a:t>
             </a:fld>
             <a:endParaRPr lang="es-PE" dirty="0"/>
           </a:p>
@@ -3600,7 +3700,7 @@
         </p:nvSpPr>
         <p:spPr>
           <a:xfrm>
-            <a:off x="474329" y="2547371"/>
+            <a:off x="474329" y="2507030"/>
             <a:ext cx="5909343" cy="954107"/>
           </a:xfrm>
           <a:prstGeom prst="rect">
@@ -3830,7 +3930,7 @@
         </p:nvSpPr>
         <p:spPr>
           <a:xfrm>
-            <a:off x="2809279" y="2287819"/>
+            <a:off x="2809279" y="2247478"/>
             <a:ext cx="1239442" cy="306109"/>
           </a:xfrm>
           <a:prstGeom prst="rect">
@@ -3887,7 +3987,7 @@
       </p:sp>
       <p:sp>
         <p:nvSpPr>
-          <p:cNvPr id="19" name="Rectangle 60">
+          <p:cNvPr id="19" name="PH_CONTENIDO_PRINCIPAL">
             <a:extLst>
               <a:ext uri="{FF2B5EF4-FFF2-40B4-BE49-F238E27FC236}">
                 <a16:creationId xmlns:a16="http://schemas.microsoft.com/office/drawing/2014/main" id="{C0D9FAA0-08E8-BE91-7635-49B14F81758C}"/>
@@ -3899,8 +3999,8 @@
         </p:nvSpPr>
         <p:spPr>
           <a:xfrm>
-            <a:off x="477169" y="3367914"/>
-            <a:ext cx="5903662" cy="2967105"/>
+            <a:off x="477169" y="3482517"/>
+            <a:ext cx="5903662" cy="1769715"/>
           </a:xfrm>
           <a:prstGeom prst="rect">
             <a:avLst/>
@@ -3910,8 +4010,8 @@
           </a:ln>
         </p:spPr>
         <p:txBody>
-          <a:bodyPr vert="horz" lIns="0" tIns="0" rIns="0" bIns="0" rtlCol="0" anchor="ctr">
-            <a:noAutofit/>
+          <a:bodyPr vert="horz" lIns="0" tIns="0" rIns="0" bIns="0" rtlCol="0" anchor="t" anchorCtr="1">
+            <a:spAutoFit/>
           </a:bodyPr>
           <a:lstStyle/>
           <a:p>
@@ -4126,7 +4226,7 @@
         </p:nvSpPr>
         <p:spPr>
           <a:xfrm>
-            <a:off x="3249609" y="7594756"/>
+            <a:off x="3249609" y="7783014"/>
             <a:ext cx="3176336" cy="303929"/>
           </a:xfrm>
           <a:prstGeom prst="rect">
@@ -4276,7 +4376,7 @@
         </p:blipFill>
         <p:spPr>
           <a:xfrm>
-            <a:off x="4978662" y="6707973"/>
+            <a:off x="4978662" y="6896231"/>
             <a:ext cx="830904" cy="830904"/>
           </a:xfrm>
           <a:prstGeom prst="rect">
@@ -4445,7 +4545,7 @@
       </p:pic>
       <p:sp>
         <p:nvSpPr>
-          <p:cNvPr id="10" name="CuadroTexto 9">
+          <p:cNvPr id="10" name="PH_TEMA">
             <a:extLst>
               <a:ext uri="{FF2B5EF4-FFF2-40B4-BE49-F238E27FC236}">
                 <a16:creationId xmlns:a16="http://schemas.microsoft.com/office/drawing/2014/main" id="{D44B2567-D1AD-5922-21FA-C8B8BF799204}"/>
@@ -5218,7 +5318,7 @@
       </p:pic>
       <p:graphicFrame>
         <p:nvGraphicFramePr>
-          <p:cNvPr id="14" name="Tabla 13">
+          <p:cNvPr id="14" name="PH_TABLA">
             <a:extLst>
               <a:ext uri="{FF2B5EF4-FFF2-40B4-BE49-F238E27FC236}">
                 <a16:creationId xmlns:a16="http://schemas.microsoft.com/office/drawing/2014/main" id="{727B0309-C2F5-4DEB-3AF8-D7FD142D7B92}"/>
@@ -5231,13 +5331,13 @@
           <p:nvPr>
             <p:extLst>
               <p:ext uri="{D42A27DB-BD31-4B8C-83A1-F6EECF244321}">
-                <p14:modId xmlns:p14="http://schemas.microsoft.com/office/powerpoint/2010/main" val="2491103922"/>
+                <p14:modId xmlns:p14="http://schemas.microsoft.com/office/powerpoint/2010/main" val="3085341771"/>
               </p:ext>
             </p:extLst>
           </p:nvPr>
         </p:nvGraphicFramePr>
         <p:xfrm>
-          <a:off x="745017" y="3129360"/>
+          <a:off x="745017" y="3115913"/>
           <a:ext cx="5367967" cy="3941796"/>
         </p:xfrm>
         <a:graphic>
@@ -5416,7 +5516,7 @@
                     <a:p>
                       <a:pPr algn="ctr"/>
                       <a:r>
-                        <a:rPr lang="es-ES" sz="1050" dirty="0"/>
+                        <a:rPr lang="es-ES" sz="950" dirty="0"/>
                         <a:t>{{MODULO_1}}</a:t>
                       </a:r>
                     </a:p>
@@ -5536,7 +5636,7 @@
                         <a:defRPr/>
                       </a:pPr>
                       <a:r>
-                        <a:rPr lang="es-ES" sz="1050" dirty="0"/>
+                        <a:rPr lang="es-ES" sz="950" dirty="0"/>
                         <a:t>{{MODULO_2}}</a:t>
                       </a:r>
                     </a:p>
@@ -5640,10 +5740,10 @@
                         <a:defRPr/>
                       </a:pPr>
                       <a:r>
-                        <a:rPr lang="es-ES" sz="1050" dirty="0"/>
+                        <a:rPr lang="es-ES" sz="950" dirty="0"/>
                         <a:t>{{MODULO_3}}</a:t>
                       </a:r>
-                      <a:endParaRPr lang="es-PE" sz="1050" b="0" i="0" kern="1200" dirty="0">
+                      <a:endParaRPr lang="es-PE" sz="950" b="0" i="0" kern="1200" dirty="0">
                         <a:solidFill>
                           <a:schemeClr val="dk1"/>
                         </a:solidFill>
@@ -5769,10 +5869,10 @@
                         <a:defRPr/>
                       </a:pPr>
                       <a:r>
-                        <a:rPr lang="es-ES" sz="1050" dirty="0"/>
+                        <a:rPr lang="es-ES" sz="950" dirty="0"/>
                         <a:t>{{MODULO_4}}</a:t>
                       </a:r>
-                      <a:endParaRPr lang="es-PE" sz="1050" b="0" i="0" kern="1200" dirty="0">
+                      <a:endParaRPr lang="es-PE" sz="950" b="0" i="0" kern="1200" dirty="0">
                         <a:solidFill>
                           <a:schemeClr val="dk1"/>
                         </a:solidFill>
@@ -5898,10 +5998,10 @@
                         <a:defRPr/>
                       </a:pPr>
                       <a:r>
-                        <a:rPr lang="es-ES" sz="1050" dirty="0"/>
+                        <a:rPr lang="es-ES" sz="950" dirty="0"/>
                         <a:t>{{MODULO_5}}</a:t>
                       </a:r>
-                      <a:endParaRPr lang="es-PE" sz="1050" b="0" i="0" kern="1200" dirty="0">
+                      <a:endParaRPr lang="es-PE" sz="950" b="0" i="0" kern="1200" dirty="0">
                         <a:solidFill>
                           <a:schemeClr val="dk1"/>
                         </a:solidFill>

--- a/app/templates/universidad_azul/plantilla_curso.pptx
+++ b/app/templates/universidad_azul/plantilla_curso.pptx
@@ -122,7 +122,7 @@
 <file path=ppt/revisionInfo.xml><?xml version="1.0" encoding="utf-8"?>
 <p1510:revInfo xmlns:a="http://schemas.openxmlformats.org/drawingml/2006/main" xmlns:r="http://schemas.openxmlformats.org/officeDocument/2006/relationships" xmlns:p1510="http://schemas.microsoft.com/office/powerpoint/2015/10/main">
   <p1510:revLst>
-    <p1510:client id="{EB93C467-2F23-4350-844F-F79CF4DA39B1}" v="5" dt="2026-03-02T01:11:12.153"/>
+    <p1510:client id="{EB93C467-2F23-4350-844F-F79CF4DA39B1}" v="8" dt="2026-03-04T23:11:13.897"/>
   </p1510:revLst>
 </p1510:revInfo>
 </file>
@@ -132,18 +132,18 @@
   <pc:docChgLst>
     <pc:chgData name="Benjamín de Jesús Cueva Niño de Guzmán" userId="56da303013910523" providerId="LiveId" clId="{532B7A48-8887-4F62-9537-0BA1FAE83637}"/>
     <pc:docChg chg="undo custSel modSld">
-      <pc:chgData name="Benjamín de Jesús Cueva Niño de Guzmán" userId="56da303013910523" providerId="LiveId" clId="{532B7A48-8887-4F62-9537-0BA1FAE83637}" dt="2026-03-02T01:11:12.153" v="50" actId="962"/>
+      <pc:chgData name="Benjamín de Jesús Cueva Niño de Guzmán" userId="56da303013910523" providerId="LiveId" clId="{532B7A48-8887-4F62-9537-0BA1FAE83637}" dt="2026-03-05T18:30:46.956" v="65" actId="12788"/>
       <pc:docMkLst>
         <pc:docMk/>
       </pc:docMkLst>
       <pc:sldChg chg="addSp delSp modSp mod">
-        <pc:chgData name="Benjamín de Jesús Cueva Niño de Guzmán" userId="56da303013910523" providerId="LiveId" clId="{532B7A48-8887-4F62-9537-0BA1FAE83637}" dt="2026-02-28T16:33:45.561" v="49" actId="478"/>
+        <pc:chgData name="Benjamín de Jesús Cueva Niño de Guzmán" userId="56da303013910523" providerId="LiveId" clId="{532B7A48-8887-4F62-9537-0BA1FAE83637}" dt="2026-03-05T18:30:46.956" v="65" actId="12788"/>
         <pc:sldMkLst>
           <pc:docMk/>
           <pc:sldMk cId="1975654795" sldId="392"/>
         </pc:sldMkLst>
         <pc:spChg chg="mod">
-          <ac:chgData name="Benjamín de Jesús Cueva Niño de Guzmán" userId="56da303013910523" providerId="LiveId" clId="{532B7A48-8887-4F62-9537-0BA1FAE83637}" dt="2026-02-28T00:01:39.011" v="17" actId="1035"/>
+          <ac:chgData name="Benjamín de Jesús Cueva Niño de Guzmán" userId="56da303013910523" providerId="LiveId" clId="{532B7A48-8887-4F62-9537-0BA1FAE83637}" dt="2026-03-04T23:13:27.567" v="62" actId="1035"/>
           <ac:spMkLst>
             <pc:docMk/>
             <pc:sldMk cId="1975654795" sldId="392"/>
@@ -151,35 +151,75 @@
           </ac:spMkLst>
         </pc:spChg>
         <pc:spChg chg="mod">
-          <ac:chgData name="Benjamín de Jesús Cueva Niño de Guzmán" userId="56da303013910523" providerId="LiveId" clId="{532B7A48-8887-4F62-9537-0BA1FAE83637}" dt="2026-02-28T00:01:39.011" v="17" actId="1035"/>
+          <ac:chgData name="Benjamín de Jesús Cueva Niño de Guzmán" userId="56da303013910523" providerId="LiveId" clId="{532B7A48-8887-4F62-9537-0BA1FAE83637}" dt="2026-03-04T23:13:27.567" v="62" actId="1035"/>
           <ac:spMkLst>
             <pc:docMk/>
             <pc:sldMk cId="1975654795" sldId="392"/>
             <ac:spMk id="3" creationId="{8DC1C730-CF27-EE49-4929-25151E2F6190}"/>
           </ac:spMkLst>
         </pc:spChg>
-        <pc:spChg chg="mod">
-          <ac:chgData name="Benjamín de Jesús Cueva Niño de Guzmán" userId="56da303013910523" providerId="LiveId" clId="{532B7A48-8887-4F62-9537-0BA1FAE83637}" dt="2026-02-28T00:03:14.598" v="45" actId="1035"/>
+        <pc:spChg chg="del mod">
+          <ac:chgData name="Benjamín de Jesús Cueva Niño de Guzmán" userId="56da303013910523" providerId="LiveId" clId="{532B7A48-8887-4F62-9537-0BA1FAE83637}" dt="2026-03-04T23:11:06.169" v="51" actId="478"/>
           <ac:spMkLst>
             <pc:docMk/>
             <pc:sldMk cId="1975654795" sldId="392"/>
             <ac:spMk id="7" creationId="{6181BA67-E1F2-0033-0081-C78685C4EFFB}"/>
           </ac:spMkLst>
         </pc:spChg>
+        <pc:spChg chg="add mod">
+          <ac:chgData name="Benjamín de Jesús Cueva Niño de Guzmán" userId="56da303013910523" providerId="LiveId" clId="{532B7A48-8887-4F62-9537-0BA1FAE83637}" dt="2026-03-04T23:11:08.697" v="52"/>
+          <ac:spMkLst>
+            <pc:docMk/>
+            <pc:sldMk cId="1975654795" sldId="392"/>
+            <ac:spMk id="9" creationId="{FEB5FCFF-713B-55C3-9D64-405FA7635F5D}"/>
+          </ac:spMkLst>
+        </pc:spChg>
+        <pc:spChg chg="add mod">
+          <ac:chgData name="Benjamín de Jesús Cueva Niño de Guzmán" userId="56da303013910523" providerId="LiveId" clId="{532B7A48-8887-4F62-9537-0BA1FAE83637}" dt="2026-03-04T23:11:08.697" v="52"/>
+          <ac:spMkLst>
+            <pc:docMk/>
+            <pc:sldMk cId="1975654795" sldId="392"/>
+            <ac:spMk id="11" creationId="{0BE00B8B-9797-9EFE-E186-9C1416B11090}"/>
+          </ac:spMkLst>
+        </pc:spChg>
+        <pc:spChg chg="add mod">
+          <ac:chgData name="Benjamín de Jesús Cueva Niño de Guzmán" userId="56da303013910523" providerId="LiveId" clId="{532B7A48-8887-4F62-9537-0BA1FAE83637}" dt="2026-03-04T23:13:27.567" v="62" actId="1035"/>
+          <ac:spMkLst>
+            <pc:docMk/>
+            <pc:sldMk cId="1975654795" sldId="392"/>
+            <ac:spMk id="13" creationId="{CE42197D-A916-781C-6D53-82EDBAA5B106}"/>
+          </ac:spMkLst>
+        </pc:spChg>
         <pc:spChg chg="mod">
-          <ac:chgData name="Benjamín de Jesús Cueva Niño de Guzmán" userId="56da303013910523" providerId="LiveId" clId="{532B7A48-8887-4F62-9537-0BA1FAE83637}" dt="2026-02-28T00:03:03.801" v="31" actId="20577"/>
+          <ac:chgData name="Benjamín de Jesús Cueva Niño de Guzmán" userId="56da303013910523" providerId="LiveId" clId="{532B7A48-8887-4F62-9537-0BA1FAE83637}" dt="2026-03-05T18:30:46.956" v="65" actId="12788"/>
           <ac:spMkLst>
             <pc:docMk/>
             <pc:sldMk cId="1975654795" sldId="392"/>
             <ac:spMk id="19" creationId="{C0D9FAA0-08E8-BE91-7635-49B14F81758C}"/>
           </ac:spMkLst>
         </pc:spChg>
-        <pc:picChg chg="mod">
-          <ac:chgData name="Benjamín de Jesús Cueva Niño de Guzmán" userId="56da303013910523" providerId="LiveId" clId="{532B7A48-8887-4F62-9537-0BA1FAE83637}" dt="2026-02-28T00:03:14.598" v="45" actId="1035"/>
+        <pc:picChg chg="del mod">
+          <ac:chgData name="Benjamín de Jesús Cueva Niño de Guzmán" userId="56da303013910523" providerId="LiveId" clId="{532B7A48-8887-4F62-9537-0BA1FAE83637}" dt="2026-03-04T23:11:06.169" v="51" actId="478"/>
           <ac:picMkLst>
             <pc:docMk/>
             <pc:sldMk cId="1975654795" sldId="392"/>
             <ac:picMk id="4" creationId="{8AFE8DB8-BB3D-9C4F-317A-D420ABEEF7CD}"/>
+          </ac:picMkLst>
+        </pc:picChg>
+        <pc:picChg chg="add mod">
+          <ac:chgData name="Benjamín de Jesús Cueva Niño de Guzmán" userId="56da303013910523" providerId="LiveId" clId="{532B7A48-8887-4F62-9537-0BA1FAE83637}" dt="2026-03-04T23:11:08.697" v="52"/>
+          <ac:picMkLst>
+            <pc:docMk/>
+            <pc:sldMk cId="1975654795" sldId="392"/>
+            <ac:picMk id="12" creationId="{1343B88D-0AD9-8865-C808-6E05EA2D17E3}"/>
+          </ac:picMkLst>
+        </pc:picChg>
+        <pc:picChg chg="add mod">
+          <ac:chgData name="Benjamín de Jesús Cueva Niño de Guzmán" userId="56da303013910523" providerId="LiveId" clId="{532B7A48-8887-4F62-9537-0BA1FAE83637}" dt="2026-03-04T23:13:27.567" v="62" actId="1035"/>
+          <ac:picMkLst>
+            <pc:docMk/>
+            <pc:sldMk cId="1975654795" sldId="392"/>
+            <ac:picMk id="15" creationId="{FB19D7C4-AA72-55BD-CDDB-15C0FA22FD0F}"/>
           </ac:picMkLst>
         </pc:picChg>
       </pc:sldChg>
@@ -301,7 +341,7 @@
           <a:p>
             <a:fld id="{03C7FEFC-EB52-44D6-B3F1-2A7BB7FA4226}" type="datetimeFigureOut">
               <a:rPr lang="es-PE" smtClean="0"/>
-              <a:t>1/03/2026</a:t>
+              <a:t>5/03/2026</a:t>
             </a:fld>
             <a:endParaRPr lang="es-PE" dirty="0"/>
           </a:p>
@@ -466,7 +506,7 @@
           <a:p>
             <a:fld id="{64955E78-CBAA-441B-9163-D9CD5E983BDA}" type="datetimeFigureOut">
               <a:rPr lang="en-US" smtClean="0"/>
-              <a:t>3/1/2026</a:t>
+              <a:t>3/5/2026</a:t>
             </a:fld>
             <a:endParaRPr lang="en-US" dirty="0"/>
           </a:p>
@@ -865,7 +905,7 @@
           <a:p>
             <a:fld id="{5C4C4E00-4716-4B48-9D97-535E4F94A274}" type="datetimeFigureOut">
               <a:rPr lang="es-PE" smtClean="0"/>
-              <a:t>1/03/2026</a:t>
+              <a:t>5/03/2026</a:t>
             </a:fld>
             <a:endParaRPr lang="es-PE" dirty="0"/>
           </a:p>
@@ -1035,7 +1075,7 @@
           <a:p>
             <a:fld id="{5C4C4E00-4716-4B48-9D97-535E4F94A274}" type="datetimeFigureOut">
               <a:rPr lang="es-PE" smtClean="0"/>
-              <a:t>1/03/2026</a:t>
+              <a:t>5/03/2026</a:t>
             </a:fld>
             <a:endParaRPr lang="es-PE" dirty="0"/>
           </a:p>
@@ -1215,7 +1255,7 @@
           <a:p>
             <a:fld id="{5C4C4E00-4716-4B48-9D97-535E4F94A274}" type="datetimeFigureOut">
               <a:rPr lang="es-PE" smtClean="0"/>
-              <a:t>1/03/2026</a:t>
+              <a:t>5/03/2026</a:t>
             </a:fld>
             <a:endParaRPr lang="es-PE" dirty="0"/>
           </a:p>
@@ -1385,7 +1425,7 @@
           <a:p>
             <a:fld id="{5C4C4E00-4716-4B48-9D97-535E4F94A274}" type="datetimeFigureOut">
               <a:rPr lang="es-PE" smtClean="0"/>
-              <a:t>1/03/2026</a:t>
+              <a:t>5/03/2026</a:t>
             </a:fld>
             <a:endParaRPr lang="es-PE" dirty="0"/>
           </a:p>
@@ -1629,7 +1669,7 @@
           <a:p>
             <a:fld id="{5C4C4E00-4716-4B48-9D97-535E4F94A274}" type="datetimeFigureOut">
               <a:rPr lang="es-PE" smtClean="0"/>
-              <a:t>1/03/2026</a:t>
+              <a:t>5/03/2026</a:t>
             </a:fld>
             <a:endParaRPr lang="es-PE" dirty="0"/>
           </a:p>
@@ -1861,7 +1901,7 @@
           <a:p>
             <a:fld id="{5C4C4E00-4716-4B48-9D97-535E4F94A274}" type="datetimeFigureOut">
               <a:rPr lang="es-PE" smtClean="0"/>
-              <a:t>1/03/2026</a:t>
+              <a:t>5/03/2026</a:t>
             </a:fld>
             <a:endParaRPr lang="es-PE" dirty="0"/>
           </a:p>
@@ -2228,7 +2268,7 @@
           <a:p>
             <a:fld id="{5C4C4E00-4716-4B48-9D97-535E4F94A274}" type="datetimeFigureOut">
               <a:rPr lang="es-PE" smtClean="0"/>
-              <a:t>1/03/2026</a:t>
+              <a:t>5/03/2026</a:t>
             </a:fld>
             <a:endParaRPr lang="es-PE" dirty="0"/>
           </a:p>
@@ -2346,7 +2386,7 @@
           <a:p>
             <a:fld id="{5C4C4E00-4716-4B48-9D97-535E4F94A274}" type="datetimeFigureOut">
               <a:rPr lang="es-PE" smtClean="0"/>
-              <a:t>1/03/2026</a:t>
+              <a:t>5/03/2026</a:t>
             </a:fld>
             <a:endParaRPr lang="es-PE" dirty="0"/>
           </a:p>
@@ -2441,7 +2481,7 @@
           <a:p>
             <a:fld id="{5C4C4E00-4716-4B48-9D97-535E4F94A274}" type="datetimeFigureOut">
               <a:rPr lang="es-PE" smtClean="0"/>
-              <a:t>1/03/2026</a:t>
+              <a:t>5/03/2026</a:t>
             </a:fld>
             <a:endParaRPr lang="es-PE" dirty="0"/>
           </a:p>
@@ -2718,7 +2758,7 @@
           <a:p>
             <a:fld id="{5C4C4E00-4716-4B48-9D97-535E4F94A274}" type="datetimeFigureOut">
               <a:rPr lang="es-PE" smtClean="0"/>
-              <a:t>1/03/2026</a:t>
+              <a:t>5/03/2026</a:t>
             </a:fld>
             <a:endParaRPr lang="es-PE" dirty="0"/>
           </a:p>
@@ -2975,7 +3015,7 @@
           <a:p>
             <a:fld id="{5C4C4E00-4716-4B48-9D97-535E4F94A274}" type="datetimeFigureOut">
               <a:rPr lang="es-PE" smtClean="0"/>
-              <a:t>1/03/2026</a:t>
+              <a:t>5/03/2026</a:t>
             </a:fld>
             <a:endParaRPr lang="es-PE" dirty="0"/>
           </a:p>
@@ -3188,7 +3228,7 @@
           <a:p>
             <a:fld id="{5C4C4E00-4716-4B48-9D97-535E4F94A274}" type="datetimeFigureOut">
               <a:rPr lang="es-PE" smtClean="0"/>
-              <a:t>1/03/2026</a:t>
+              <a:t>5/03/2026</a:t>
             </a:fld>
             <a:endParaRPr lang="es-PE" dirty="0"/>
           </a:p>
@@ -3700,7 +3740,7 @@
         </p:nvSpPr>
         <p:spPr>
           <a:xfrm>
-            <a:off x="474329" y="2507030"/>
+            <a:off x="474329" y="2493583"/>
             <a:ext cx="5909343" cy="954107"/>
           </a:xfrm>
           <a:prstGeom prst="rect">
@@ -3930,7 +3970,7 @@
         </p:nvSpPr>
         <p:spPr>
           <a:xfrm>
-            <a:off x="2809279" y="2247478"/>
+            <a:off x="2809279" y="2234031"/>
             <a:ext cx="1239442" cy="306109"/>
           </a:xfrm>
           <a:prstGeom prst="rect">
@@ -3999,8 +4039,8 @@
         </p:nvSpPr>
         <p:spPr>
           <a:xfrm>
-            <a:off x="477169" y="3482517"/>
-            <a:ext cx="5903662" cy="1769715"/>
+            <a:off x="419400" y="3415282"/>
+            <a:ext cx="6019200" cy="1769715"/>
           </a:xfrm>
           <a:prstGeom prst="rect">
             <a:avLst/>
@@ -4208,55 +4248,6 @@
                 <a:cs typeface="Times New Roman" panose="02020603050405020304" pitchFamily="18" charset="0"/>
               </a:rPr>
               <a:t>Por tanto, se expide el presente Certificado para que se le reconozca como tal.</a:t>
-            </a:r>
-          </a:p>
-        </p:txBody>
-      </p:sp>
-      <p:sp>
-        <p:nvSpPr>
-          <p:cNvPr id="7" name="Rectángulo 6">
-            <a:extLst>
-              <a:ext uri="{FF2B5EF4-FFF2-40B4-BE49-F238E27FC236}">
-                <a16:creationId xmlns:a16="http://schemas.microsoft.com/office/drawing/2014/main" id="{6181BA67-E1F2-0033-0081-C78685C4EFFB}"/>
-              </a:ext>
-            </a:extLst>
-          </p:cNvPr>
-          <p:cNvSpPr/>
-          <p:nvPr/>
-        </p:nvSpPr>
-        <p:spPr>
-          <a:xfrm>
-            <a:off x="3249609" y="7783014"/>
-            <a:ext cx="3176336" cy="303929"/>
-          </a:xfrm>
-          <a:prstGeom prst="rect">
-            <a:avLst/>
-          </a:prstGeom>
-        </p:spPr>
-        <p:txBody>
-          <a:bodyPr wrap="square">
-            <a:spAutoFit/>
-          </a:bodyPr>
-          <a:lstStyle/>
-          <a:p>
-            <a:pPr lvl="0" algn="r">
-              <a:lnSpc>
-                <a:spcPct val="115000"/>
-              </a:lnSpc>
-              <a:spcBef>
-                <a:spcPts val="59"/>
-              </a:spcBef>
-            </a:pPr>
-            <a:r>
-              <a:rPr lang="es-PE" sz="1300" dirty="0">
-                <a:solidFill>
-                  <a:prstClr val="black"/>
-                </a:solidFill>
-                <a:latin typeface="Times New Roman" panose="02020603050405020304" pitchFamily="18" charset="0"/>
-                <a:ea typeface="Cambria Math" panose="02040503050406030204" pitchFamily="18" charset="0"/>
-                <a:cs typeface="Times New Roman" panose="02020603050405020304" pitchFamily="18" charset="0"/>
-              </a:rPr>
-              <a:t>Trujillo, {{FECHA_EMISION_LARGA}}</a:t>
             </a:r>
           </a:p>
         </p:txBody>
@@ -4350,42 +4341,6 @@
       </p:pic>
       <p:pic>
         <p:nvPicPr>
-          <p:cNvPr id="4" name="Imagen 3">
-            <a:extLst>
-              <a:ext uri="{FF2B5EF4-FFF2-40B4-BE49-F238E27FC236}">
-                <a16:creationId xmlns:a16="http://schemas.microsoft.com/office/drawing/2014/main" id="{8AFE8DB8-BB3D-9C4F-317A-D420ABEEF7CD}"/>
-              </a:ext>
-            </a:extLst>
-          </p:cNvPr>
-          <p:cNvPicPr>
-            <a:picLocks noChangeAspect="1"/>
-          </p:cNvPicPr>
-          <p:nvPr/>
-        </p:nvPicPr>
-        <p:blipFill>
-          <a:blip r:embed="rId6" cstate="print">
-            <a:extLst>
-              <a:ext uri="{28A0092B-C50C-407E-A947-70E740481C1C}">
-                <a14:useLocalDpi xmlns:a14="http://schemas.microsoft.com/office/drawing/2010/main" val="0"/>
-              </a:ext>
-            </a:extLst>
-          </a:blip>
-          <a:stretch>
-            <a:fillRect/>
-          </a:stretch>
-        </p:blipFill>
-        <p:spPr>
-          <a:xfrm>
-            <a:off x="4978662" y="6896231"/>
-            <a:ext cx="830904" cy="830904"/>
-          </a:xfrm>
-          <a:prstGeom prst="rect">
-            <a:avLst/>
-          </a:prstGeom>
-        </p:spPr>
-      </p:pic>
-      <p:pic>
-        <p:nvPicPr>
           <p:cNvPr id="5" name="Imagen 4" descr="Imagen en blanco y negro&#10;&#10;Descripción generada automáticamente con confianza baja">
             <a:extLst>
               <a:ext uri="{FF2B5EF4-FFF2-40B4-BE49-F238E27FC236}">
@@ -4399,7 +4354,7 @@
           <p:nvPr/>
         </p:nvPicPr>
         <p:blipFill>
-          <a:blip r:embed="rId7">
+          <a:blip r:embed="rId6">
             <a:extLst>
               <a:ext uri="{28A0092B-C50C-407E-A947-70E740481C1C}">
                 <a14:useLocalDpi xmlns:a14="http://schemas.microsoft.com/office/drawing/2010/main" val="0"/>
@@ -4414,6 +4369,204 @@
           <a:xfrm>
             <a:off x="1727435" y="7803847"/>
             <a:ext cx="2813850" cy="1216800"/>
+          </a:xfrm>
+          <a:prstGeom prst="rect">
+            <a:avLst/>
+          </a:prstGeom>
+        </p:spPr>
+      </p:pic>
+      <p:sp>
+        <p:nvSpPr>
+          <p:cNvPr id="13" name="Rectángulo 12">
+            <a:extLst>
+              <a:ext uri="{FF2B5EF4-FFF2-40B4-BE49-F238E27FC236}">
+                <a16:creationId xmlns:a16="http://schemas.microsoft.com/office/drawing/2014/main" id="{CE42197D-A916-781C-6D53-82EDBAA5B106}"/>
+              </a:ext>
+            </a:extLst>
+          </p:cNvPr>
+          <p:cNvSpPr/>
+          <p:nvPr/>
+        </p:nvSpPr>
+        <p:spPr>
+          <a:xfrm>
+            <a:off x="3339591" y="7775992"/>
+            <a:ext cx="3176336" cy="303929"/>
+          </a:xfrm>
+          <a:prstGeom prst="rect">
+            <a:avLst/>
+          </a:prstGeom>
+        </p:spPr>
+        <p:txBody>
+          <a:bodyPr wrap="square">
+            <a:spAutoFit/>
+          </a:bodyPr>
+          <a:lstStyle>
+            <a:defPPr>
+              <a:defRPr lang="en-US"/>
+            </a:defPPr>
+            <a:lvl1pPr marL="0" algn="l" defTabSz="457200" rtl="0" eaLnBrk="1" latinLnBrk="0" hangingPunct="1">
+              <a:defRPr sz="1800" kern="1200">
+                <a:solidFill>
+                  <a:schemeClr val="tx1"/>
+                </a:solidFill>
+                <a:latin typeface="+mn-lt"/>
+                <a:ea typeface="+mn-ea"/>
+                <a:cs typeface="+mn-cs"/>
+              </a:defRPr>
+            </a:lvl1pPr>
+            <a:lvl2pPr marL="457200" algn="l" defTabSz="457200" rtl="0" eaLnBrk="1" latinLnBrk="0" hangingPunct="1">
+              <a:defRPr sz="1800" kern="1200">
+                <a:solidFill>
+                  <a:schemeClr val="tx1"/>
+                </a:solidFill>
+                <a:latin typeface="+mn-lt"/>
+                <a:ea typeface="+mn-ea"/>
+                <a:cs typeface="+mn-cs"/>
+              </a:defRPr>
+            </a:lvl2pPr>
+            <a:lvl3pPr marL="914400" algn="l" defTabSz="457200" rtl="0" eaLnBrk="1" latinLnBrk="0" hangingPunct="1">
+              <a:defRPr sz="1800" kern="1200">
+                <a:solidFill>
+                  <a:schemeClr val="tx1"/>
+                </a:solidFill>
+                <a:latin typeface="+mn-lt"/>
+                <a:ea typeface="+mn-ea"/>
+                <a:cs typeface="+mn-cs"/>
+              </a:defRPr>
+            </a:lvl3pPr>
+            <a:lvl4pPr marL="1371600" algn="l" defTabSz="457200" rtl="0" eaLnBrk="1" latinLnBrk="0" hangingPunct="1">
+              <a:defRPr sz="1800" kern="1200">
+                <a:solidFill>
+                  <a:schemeClr val="tx1"/>
+                </a:solidFill>
+                <a:latin typeface="+mn-lt"/>
+                <a:ea typeface="+mn-ea"/>
+                <a:cs typeface="+mn-cs"/>
+              </a:defRPr>
+            </a:lvl4pPr>
+            <a:lvl5pPr marL="1828800" algn="l" defTabSz="457200" rtl="0" eaLnBrk="1" latinLnBrk="0" hangingPunct="1">
+              <a:defRPr sz="1800" kern="1200">
+                <a:solidFill>
+                  <a:schemeClr val="tx1"/>
+                </a:solidFill>
+                <a:latin typeface="+mn-lt"/>
+                <a:ea typeface="+mn-ea"/>
+                <a:cs typeface="+mn-cs"/>
+              </a:defRPr>
+            </a:lvl5pPr>
+            <a:lvl6pPr marL="2286000" algn="l" defTabSz="457200" rtl="0" eaLnBrk="1" latinLnBrk="0" hangingPunct="1">
+              <a:defRPr sz="1800" kern="1200">
+                <a:solidFill>
+                  <a:schemeClr val="tx1"/>
+                </a:solidFill>
+                <a:latin typeface="+mn-lt"/>
+                <a:ea typeface="+mn-ea"/>
+                <a:cs typeface="+mn-cs"/>
+              </a:defRPr>
+            </a:lvl6pPr>
+            <a:lvl7pPr marL="2743200" algn="l" defTabSz="457200" rtl="0" eaLnBrk="1" latinLnBrk="0" hangingPunct="1">
+              <a:defRPr sz="1800" kern="1200">
+                <a:solidFill>
+                  <a:schemeClr val="tx1"/>
+                </a:solidFill>
+                <a:latin typeface="+mn-lt"/>
+                <a:ea typeface="+mn-ea"/>
+                <a:cs typeface="+mn-cs"/>
+              </a:defRPr>
+            </a:lvl7pPr>
+            <a:lvl8pPr marL="3200400" algn="l" defTabSz="457200" rtl="0" eaLnBrk="1" latinLnBrk="0" hangingPunct="1">
+              <a:defRPr sz="1800" kern="1200">
+                <a:solidFill>
+                  <a:schemeClr val="tx1"/>
+                </a:solidFill>
+                <a:latin typeface="+mn-lt"/>
+                <a:ea typeface="+mn-ea"/>
+                <a:cs typeface="+mn-cs"/>
+              </a:defRPr>
+            </a:lvl8pPr>
+            <a:lvl9pPr marL="3657600" algn="l" defTabSz="457200" rtl="0" eaLnBrk="1" latinLnBrk="0" hangingPunct="1">
+              <a:defRPr sz="1800" kern="1200">
+                <a:solidFill>
+                  <a:schemeClr val="tx1"/>
+                </a:solidFill>
+                <a:latin typeface="+mn-lt"/>
+                <a:ea typeface="+mn-ea"/>
+                <a:cs typeface="+mn-cs"/>
+              </a:defRPr>
+            </a:lvl9pPr>
+          </a:lstStyle>
+          <a:p>
+            <a:pPr lvl="0" algn="r">
+              <a:lnSpc>
+                <a:spcPct val="115000"/>
+              </a:lnSpc>
+              <a:spcBef>
+                <a:spcPts val="59"/>
+              </a:spcBef>
+            </a:pPr>
+            <a:r>
+              <a:rPr lang="es-PE" sz="1300" dirty="0">
+                <a:solidFill>
+                  <a:prstClr val="black"/>
+                </a:solidFill>
+                <a:latin typeface="Times New Roman" panose="02020603050405020304" pitchFamily="18" charset="0"/>
+                <a:ea typeface="Cambria Math" panose="02040503050406030204" pitchFamily="18" charset="0"/>
+                <a:cs typeface="Times New Roman" panose="02020603050405020304" pitchFamily="18" charset="0"/>
+              </a:rPr>
+              <a:t>Trujillo, </a:t>
+            </a:r>
+            <a:r>
+              <a:rPr lang="es-ES" sz="1300" dirty="0">
+                <a:solidFill>
+                  <a:srgbClr val="000000"/>
+                </a:solidFill>
+                <a:latin typeface="Times New Roman" panose="02020603050405020304" pitchFamily="18" charset="0"/>
+                <a:ea typeface="Cambria Math" panose="02040503050406030204" pitchFamily="18" charset="0"/>
+                <a:cs typeface="Times New Roman" panose="02020603050405020304" pitchFamily="18" charset="0"/>
+              </a:rPr>
+              <a:t>{{FECHA_EMISION_LARGA}}</a:t>
+            </a:r>
+            <a:endParaRPr lang="en-US" sz="1300" dirty="0">
+              <a:solidFill>
+                <a:prstClr val="black"/>
+              </a:solidFill>
+              <a:latin typeface="Times New Roman" panose="02020603050405020304" pitchFamily="18" charset="0"/>
+              <a:ea typeface="Cambria Math" panose="02040503050406030204" pitchFamily="18" charset="0"/>
+              <a:cs typeface="Times New Roman" panose="02020603050405020304" pitchFamily="18" charset="0"/>
+            </a:endParaRPr>
+          </a:p>
+        </p:txBody>
+      </p:sp>
+      <p:pic>
+        <p:nvPicPr>
+          <p:cNvPr id="15" name="Imagen 14">
+            <a:extLst>
+              <a:ext uri="{FF2B5EF4-FFF2-40B4-BE49-F238E27FC236}">
+                <a16:creationId xmlns:a16="http://schemas.microsoft.com/office/drawing/2014/main" id="{FB19D7C4-AA72-55BD-CDDB-15C0FA22FD0F}"/>
+              </a:ext>
+            </a:extLst>
+          </p:cNvPr>
+          <p:cNvPicPr>
+            <a:picLocks noChangeAspect="1"/>
+          </p:cNvPicPr>
+          <p:nvPr/>
+        </p:nvPicPr>
+        <p:blipFill>
+          <a:blip r:embed="rId7" cstate="print">
+            <a:extLst>
+              <a:ext uri="{28A0092B-C50C-407E-A947-70E740481C1C}">
+                <a14:useLocalDpi xmlns:a14="http://schemas.microsoft.com/office/drawing/2010/main" val="0"/>
+              </a:ext>
+            </a:extLst>
+          </a:blip>
+          <a:stretch>
+            <a:fillRect/>
+          </a:stretch>
+        </p:blipFill>
+        <p:spPr>
+          <a:xfrm>
+            <a:off x="5140422" y="6945088"/>
+            <a:ext cx="830904" cy="830904"/>
           </a:xfrm>
           <a:prstGeom prst="rect">
             <a:avLst/>
